--- a/free-flagship-assets/60min-v2.0.1/PRESENTER_VERSION_Decide_Whether_to_Stay_or_Leave_Your_Job_FREE_FLAGSHIP_60MIN_v2.0.1_CANDIDATE.pptx
+++ b/free-flagship-assets/60min-v2.0.1/PRESENTER_VERSION_Decide_Whether_to_Stay_or_Leave_Your_Job_FREE_FLAGSHIP_60MIN_v2.0.1_CANDIDATE.pptx
@@ -7843,8 +7843,8 @@
         </p:nvSpPr>
         <p:spPr>
           <a:xfrm>
-            <a:off x="566928" y="1755648"/>
-            <a:ext cx="8010144" cy="822960"/>
+            <a:off x="566928" y="1719072"/>
+            <a:ext cx="8010144" cy="859536"/>
           </a:xfrm>
           <a:prstGeom prst="rect">
             <a:avLst/>
@@ -7863,8 +7863,8 @@
         </p:nvSpPr>
         <p:spPr>
           <a:xfrm>
-            <a:off x="566928" y="1755648"/>
-            <a:ext cx="41148" cy="822960"/>
+            <a:off x="566928" y="1719072"/>
+            <a:ext cx="41148" cy="859536"/>
           </a:xfrm>
           <a:prstGeom prst="rect">
             <a:avLst/>
@@ -7883,7 +7883,7 @@
         </p:nvSpPr>
         <p:spPr>
           <a:xfrm>
-            <a:off x="804672" y="1819656"/>
+            <a:off x="804672" y="1783080"/>
             <a:ext cx="7552944" cy="201168"/>
           </a:xfrm>
           <a:prstGeom prst="rect">
@@ -7922,7 +7922,7 @@
         </p:nvSpPr>
         <p:spPr>
           <a:xfrm>
-            <a:off x="804672" y="2029968"/>
+            <a:off x="804672" y="1993392"/>
             <a:ext cx="7552944" cy="201168"/>
           </a:xfrm>
           <a:prstGeom prst="rect">
@@ -7961,7 +7961,7 @@
         </p:nvSpPr>
         <p:spPr>
           <a:xfrm>
-            <a:off x="804672" y="2240280"/>
+            <a:off x="804672" y="2203704"/>
             <a:ext cx="7552944" cy="310896"/>
           </a:xfrm>
           <a:prstGeom prst="rect">
@@ -8003,8 +8003,8 @@
         </p:nvSpPr>
         <p:spPr>
           <a:xfrm>
-            <a:off x="566928" y="2651760"/>
-            <a:ext cx="8010144" cy="822960"/>
+            <a:off x="566928" y="2624328"/>
+            <a:ext cx="8010144" cy="859536"/>
           </a:xfrm>
           <a:prstGeom prst="rect">
             <a:avLst/>
@@ -8023,8 +8023,8 @@
         </p:nvSpPr>
         <p:spPr>
           <a:xfrm>
-            <a:off x="566928" y="2651760"/>
-            <a:ext cx="41148" cy="822960"/>
+            <a:off x="566928" y="2624328"/>
+            <a:ext cx="41148" cy="859536"/>
           </a:xfrm>
           <a:prstGeom prst="rect">
             <a:avLst/>
@@ -8043,7 +8043,7 @@
         </p:nvSpPr>
         <p:spPr>
           <a:xfrm>
-            <a:off x="804672" y="2715768"/>
+            <a:off x="804672" y="2688336"/>
             <a:ext cx="7552944" cy="201168"/>
           </a:xfrm>
           <a:prstGeom prst="rect">
@@ -8082,7 +8082,7 @@
         </p:nvSpPr>
         <p:spPr>
           <a:xfrm>
-            <a:off x="804672" y="2926080"/>
+            <a:off x="804672" y="2898648"/>
             <a:ext cx="7552944" cy="201168"/>
           </a:xfrm>
           <a:prstGeom prst="rect">
@@ -8121,7 +8121,7 @@
         </p:nvSpPr>
         <p:spPr>
           <a:xfrm>
-            <a:off x="804672" y="3136392"/>
+            <a:off x="804672" y="3108960"/>
             <a:ext cx="7552944" cy="310896"/>
           </a:xfrm>
           <a:prstGeom prst="rect">
@@ -8163,8 +8163,8 @@
         </p:nvSpPr>
         <p:spPr>
           <a:xfrm>
-            <a:off x="566928" y="3547872"/>
-            <a:ext cx="8010144" cy="822960"/>
+            <a:off x="566928" y="3529584"/>
+            <a:ext cx="8010144" cy="859536"/>
           </a:xfrm>
           <a:prstGeom prst="rect">
             <a:avLst/>
@@ -8183,8 +8183,8 @@
         </p:nvSpPr>
         <p:spPr>
           <a:xfrm>
-            <a:off x="566928" y="3547872"/>
-            <a:ext cx="41148" cy="822960"/>
+            <a:off x="566928" y="3529584"/>
+            <a:ext cx="41148" cy="859536"/>
           </a:xfrm>
           <a:prstGeom prst="rect">
             <a:avLst/>
@@ -8203,7 +8203,7 @@
         </p:nvSpPr>
         <p:spPr>
           <a:xfrm>
-            <a:off x="804672" y="3611880"/>
+            <a:off x="804672" y="3593592"/>
             <a:ext cx="7552944" cy="201168"/>
           </a:xfrm>
           <a:prstGeom prst="rect">
@@ -8242,7 +8242,7 @@
         </p:nvSpPr>
         <p:spPr>
           <a:xfrm>
-            <a:off x="804672" y="3822192"/>
+            <a:off x="804672" y="3803904"/>
             <a:ext cx="7552944" cy="201168"/>
           </a:xfrm>
           <a:prstGeom prst="rect">
@@ -8281,7 +8281,7 @@
         </p:nvSpPr>
         <p:spPr>
           <a:xfrm>
-            <a:off x="804672" y="4032504"/>
+            <a:off x="804672" y="4014216"/>
             <a:ext cx="7552944" cy="310896"/>
           </a:xfrm>
           <a:prstGeom prst="rect">
@@ -10017,7 +10017,7 @@
         <p:spPr>
           <a:xfrm>
             <a:off x="566928" y="2286000"/>
-            <a:ext cx="676656" cy="1481328"/>
+            <a:ext cx="676656" cy="1371600"/>
           </a:xfrm>
           <a:prstGeom prst="rect">
             <a:avLst/>
@@ -10037,7 +10037,7 @@
         <p:spPr>
           <a:xfrm>
             <a:off x="566928" y="2286000"/>
-            <a:ext cx="676656" cy="1481328"/>
+            <a:ext cx="676656" cy="1371600"/>
           </a:xfrm>
           <a:prstGeom prst="rect">
             <a:avLst/>
@@ -10076,7 +10076,7 @@
         <p:spPr>
           <a:xfrm>
             <a:off x="1408176" y="2286000"/>
-            <a:ext cx="7168896" cy="1481328"/>
+            <a:ext cx="7168896" cy="1371600"/>
           </a:xfrm>
           <a:prstGeom prst="rect">
             <a:avLst/>
@@ -10134,7 +10134,7 @@
         </p:nvSpPr>
         <p:spPr>
           <a:xfrm>
-            <a:off x="1609344" y="2724912"/>
+            <a:off x="1609344" y="2688336"/>
             <a:ext cx="82296" cy="82296"/>
           </a:xfrm>
           <a:prstGeom prst="rect">
@@ -10154,7 +10154,7 @@
         </p:nvSpPr>
         <p:spPr>
           <a:xfrm>
-            <a:off x="1810512" y="2651760"/>
+            <a:off x="1810512" y="2615184"/>
             <a:ext cx="6565392" cy="237744"/>
           </a:xfrm>
           <a:prstGeom prst="rect">
@@ -10193,7 +10193,7 @@
         </p:nvSpPr>
         <p:spPr>
           <a:xfrm>
-            <a:off x="1609344" y="2999232"/>
+            <a:off x="1609344" y="2944368"/>
             <a:ext cx="82296" cy="82296"/>
           </a:xfrm>
           <a:prstGeom prst="rect">
@@ -10213,7 +10213,7 @@
         </p:nvSpPr>
         <p:spPr>
           <a:xfrm>
-            <a:off x="1810512" y="2926080"/>
+            <a:off x="1810512" y="2871216"/>
             <a:ext cx="6565392" cy="237744"/>
           </a:xfrm>
           <a:prstGeom prst="rect">
@@ -10252,7 +10252,7 @@
         </p:nvSpPr>
         <p:spPr>
           <a:xfrm>
-            <a:off x="1609344" y="3273552"/>
+            <a:off x="1609344" y="3200400"/>
             <a:ext cx="82296" cy="82296"/>
           </a:xfrm>
           <a:prstGeom prst="rect">
@@ -10272,7 +10272,7 @@
         </p:nvSpPr>
         <p:spPr>
           <a:xfrm>
-            <a:off x="1810512" y="3200400"/>
+            <a:off x="1810512" y="3127248"/>
             <a:ext cx="6565392" cy="237744"/>
           </a:xfrm>
           <a:prstGeom prst="rect">
@@ -10311,7 +10311,7 @@
         </p:nvSpPr>
         <p:spPr>
           <a:xfrm>
-            <a:off x="1609344" y="3547872"/>
+            <a:off x="1609344" y="3456432"/>
             <a:ext cx="82296" cy="82296"/>
           </a:xfrm>
           <a:prstGeom prst="rect">
@@ -10331,7 +10331,7 @@
         </p:nvSpPr>
         <p:spPr>
           <a:xfrm>
-            <a:off x="1810512" y="3474720"/>
+            <a:off x="1810512" y="3383280"/>
             <a:ext cx="6565392" cy="237744"/>
           </a:xfrm>
           <a:prstGeom prst="rect">
@@ -10370,8 +10370,8 @@
         </p:nvSpPr>
         <p:spPr>
           <a:xfrm>
-            <a:off x="566928" y="3877056"/>
-            <a:ext cx="676656" cy="512064"/>
+            <a:off x="566928" y="3749040"/>
+            <a:ext cx="676656" cy="457200"/>
           </a:xfrm>
           <a:prstGeom prst="rect">
             <a:avLst/>
@@ -10390,8 +10390,8 @@
         </p:nvSpPr>
         <p:spPr>
           <a:xfrm>
-            <a:off x="566928" y="3877056"/>
-            <a:ext cx="676656" cy="512064"/>
+            <a:off x="566928" y="3749040"/>
+            <a:ext cx="676656" cy="457200"/>
           </a:xfrm>
           <a:prstGeom prst="rect">
             <a:avLst/>
@@ -10429,8 +10429,8 @@
         </p:nvSpPr>
         <p:spPr>
           <a:xfrm>
-            <a:off x="1408176" y="3877056"/>
-            <a:ext cx="7168896" cy="512064"/>
+            <a:off x="1408176" y="3749040"/>
+            <a:ext cx="7168896" cy="457200"/>
           </a:xfrm>
           <a:prstGeom prst="rect">
             <a:avLst/>
@@ -10449,8 +10449,8 @@
         </p:nvSpPr>
         <p:spPr>
           <a:xfrm>
-            <a:off x="1609344" y="3877056"/>
-            <a:ext cx="6766560" cy="512064"/>
+            <a:off x="1609344" y="3749040"/>
+            <a:ext cx="6766560" cy="457200"/>
           </a:xfrm>
           <a:prstGeom prst="rect">
             <a:avLst/>
@@ -10488,20 +10488,23 @@
         </p:nvSpPr>
         <p:spPr>
           <a:xfrm>
-            <a:off x="566928" y="4443984"/>
-            <a:ext cx="8010144" cy="219456"/>
-          </a:xfrm>
-          <a:prstGeom prst="rect">
-            <a:avLst/>
-          </a:prstGeom>
-          <a:noFill/>
-          <a:ln/>
-        </p:spPr>
-        <p:txBody>
-          <a:bodyPr wrap="square" lIns="0" tIns="0" rIns="0" bIns="0" rtlCol="0" anchor="ctr"/>
-          <a:lstStyle/>
-          <a:p>
-            <a:pPr indent="0" marL="0">
+            <a:off x="566928" y="4297680"/>
+            <a:ext cx="8010144" cy="365760"/>
+          </a:xfrm>
+          <a:prstGeom prst="rect">
+            <a:avLst/>
+          </a:prstGeom>
+          <a:noFill/>
+          <a:ln/>
+        </p:spPr>
+        <p:txBody>
+          <a:bodyPr wrap="square" lIns="0" tIns="0" rIns="0" bIns="0" rtlCol="0" anchor="ctr"/>
+          <a:lstStyle/>
+          <a:p>
+            <a:pPr indent="0" marL="0">
+              <a:lnSpc>
+                <a:spcPts val="1250"/>
+              </a:lnSpc>
               <a:buNone/>
             </a:pPr>
             <a:r>
@@ -10513,7 +10516,27 @@
                 <a:ea typeface="DM Sans" pitchFamily="34" charset="-122"/>
                 <a:cs typeface="DM Sans" pitchFamily="34" charset="-120"/>
               </a:rPr>
-              <a:t>ONE axis in the 17–21 band: read the two adjacent states the OTHER axis selects.    BOTH axes in the band: record Boundary and assign no single state.</a:t>
+              <a:t>ONE axis in the 17–21 band: read the two adjacent states the OTHER axis selects.</a:t>
+            </a:r>
+            <a:endParaRPr lang="en-US" sz="960" dirty="0"/>
+          </a:p>
+          <a:p>
+            <a:pPr indent="0" marL="0">
+              <a:lnSpc>
+                <a:spcPts val="1250"/>
+              </a:lnSpc>
+              <a:buNone/>
+            </a:pPr>
+            <a:r>
+              <a:rPr lang="en-US" sz="960" b="1" dirty="0">
+                <a:solidFill>
+                  <a:srgbClr val="C1440E"/>
+                </a:solidFill>
+                <a:latin typeface="DM Sans" pitchFamily="34" charset="0"/>
+                <a:ea typeface="DM Sans" pitchFamily="34" charset="-122"/>
+                <a:cs typeface="DM Sans" pitchFamily="34" charset="-120"/>
+              </a:rPr>
+              <a:t>BOTH axes in the band: record Boundary and assign no single state.</a:t>
             </a:r>
             <a:endParaRPr lang="en-US" sz="960" dirty="0"/>
           </a:p>
@@ -12692,7 +12715,7 @@
         <p:spPr>
           <a:xfrm>
             <a:off x="987552" y="1755648"/>
-            <a:ext cx="2651760" cy="274320"/>
+            <a:ext cx="2432304" cy="274320"/>
           </a:xfrm>
           <a:prstGeom prst="rect">
             <a:avLst/>
@@ -12730,8 +12753,8 @@
         </p:nvSpPr>
         <p:spPr>
           <a:xfrm>
-            <a:off x="3767328" y="1755648"/>
-            <a:ext cx="4809744" cy="274320"/>
+            <a:off x="3566160" y="1755648"/>
+            <a:ext cx="5010912" cy="274320"/>
           </a:xfrm>
           <a:prstGeom prst="rect">
             <a:avLst/>
@@ -12829,7 +12852,7 @@
         <p:spPr>
           <a:xfrm>
             <a:off x="987552" y="2121408"/>
-            <a:ext cx="2651760" cy="274320"/>
+            <a:ext cx="2432304" cy="274320"/>
           </a:xfrm>
           <a:prstGeom prst="rect">
             <a:avLst/>
@@ -12867,8 +12890,8 @@
         </p:nvSpPr>
         <p:spPr>
           <a:xfrm>
-            <a:off x="3767328" y="2121408"/>
-            <a:ext cx="4809744" cy="274320"/>
+            <a:off x="3566160" y="2121408"/>
+            <a:ext cx="5010912" cy="274320"/>
           </a:xfrm>
           <a:prstGeom prst="rect">
             <a:avLst/>
@@ -12966,7 +12989,7 @@
         <p:spPr>
           <a:xfrm>
             <a:off x="987552" y="2487168"/>
-            <a:ext cx="2651760" cy="274320"/>
+            <a:ext cx="2432304" cy="274320"/>
           </a:xfrm>
           <a:prstGeom prst="rect">
             <a:avLst/>
@@ -13004,8 +13027,8 @@
         </p:nvSpPr>
         <p:spPr>
           <a:xfrm>
-            <a:off x="3767328" y="2487168"/>
-            <a:ext cx="4809744" cy="274320"/>
+            <a:off x="3566160" y="2487168"/>
+            <a:ext cx="5010912" cy="274320"/>
           </a:xfrm>
           <a:prstGeom prst="rect">
             <a:avLst/>
@@ -13103,7 +13126,7 @@
         <p:spPr>
           <a:xfrm>
             <a:off x="987552" y="2852928"/>
-            <a:ext cx="2651760" cy="274320"/>
+            <a:ext cx="2432304" cy="274320"/>
           </a:xfrm>
           <a:prstGeom prst="rect">
             <a:avLst/>
@@ -13141,8 +13164,8 @@
         </p:nvSpPr>
         <p:spPr>
           <a:xfrm>
-            <a:off x="3767328" y="2852928"/>
-            <a:ext cx="4809744" cy="274320"/>
+            <a:off x="3566160" y="2852928"/>
+            <a:ext cx="5010912" cy="274320"/>
           </a:xfrm>
           <a:prstGeom prst="rect">
             <a:avLst/>
@@ -13240,7 +13263,7 @@
         <p:spPr>
           <a:xfrm>
             <a:off x="987552" y="3218688"/>
-            <a:ext cx="2651760" cy="274320"/>
+            <a:ext cx="2432304" cy="274320"/>
           </a:xfrm>
           <a:prstGeom prst="rect">
             <a:avLst/>
@@ -13278,8 +13301,8 @@
         </p:nvSpPr>
         <p:spPr>
           <a:xfrm>
-            <a:off x="3767328" y="3218688"/>
-            <a:ext cx="4809744" cy="274320"/>
+            <a:off x="3566160" y="3218688"/>
+            <a:ext cx="5010912" cy="274320"/>
           </a:xfrm>
           <a:prstGeom prst="rect">
             <a:avLst/>
@@ -13377,7 +13400,7 @@
         <p:spPr>
           <a:xfrm>
             <a:off x="987552" y="3584448"/>
-            <a:ext cx="2651760" cy="274320"/>
+            <a:ext cx="2432304" cy="274320"/>
           </a:xfrm>
           <a:prstGeom prst="rect">
             <a:avLst/>
@@ -13415,8 +13438,8 @@
         </p:nvSpPr>
         <p:spPr>
           <a:xfrm>
-            <a:off x="3767328" y="3584448"/>
-            <a:ext cx="4809744" cy="274320"/>
+            <a:off x="3566160" y="3584448"/>
+            <a:ext cx="5010912" cy="274320"/>
           </a:xfrm>
           <a:prstGeom prst="rect">
             <a:avLst/>
@@ -13514,7 +13537,7 @@
         <p:spPr>
           <a:xfrm>
             <a:off x="987552" y="3950208"/>
-            <a:ext cx="2651760" cy="274320"/>
+            <a:ext cx="2432304" cy="274320"/>
           </a:xfrm>
           <a:prstGeom prst="rect">
             <a:avLst/>
@@ -13552,8 +13575,8 @@
         </p:nvSpPr>
         <p:spPr>
           <a:xfrm>
-            <a:off x="3767328" y="3950208"/>
-            <a:ext cx="4809744" cy="274320"/>
+            <a:off x="3566160" y="3950208"/>
+            <a:ext cx="5010912" cy="274320"/>
           </a:xfrm>
           <a:prstGeom prst="rect">
             <a:avLst/>
